--- a/examples/bento.pptx
+++ b/examples/bento.pptx
@@ -14,6 +14,7 @@
     <p:sldId id="262" r:id="rId13"/>
     <p:sldId id="263" r:id="rId14"/>
     <p:sldId id="264" r:id="rId15"/>
+    <p:sldId id="265" r:id="rId16"/>
   </p:sldIdLst>
   <p:sldSz cx="12192000" cy="6858000" type="screen4x3"/>
   <p:notesSz cx="6858000" cy="9144000"/>
@@ -3769,7 +3770,7 @@
         <p:spPr>
           <a:xfrm>
             <a:off x="8273950" y="4724400"/>
-            <a:ext cx="866775" cy="276225"/>
+            <a:ext cx="619125" cy="276225"/>
           </a:xfrm>
           <a:prstGeom prst="roundRect">
             <a:avLst>
@@ -3814,8 +3815,8 @@
         </p:nvSpPr>
         <p:spPr>
           <a:xfrm>
-            <a:off x="9216925" y="4724400"/>
-            <a:ext cx="619125" cy="276225"/>
+            <a:off x="8969275" y="4724400"/>
+            <a:ext cx="866775" cy="276225"/>
           </a:xfrm>
           <a:prstGeom prst="roundRect">
             <a:avLst>
@@ -3861,7 +3862,7 @@
         <p:spPr>
           <a:xfrm>
             <a:off x="9912250" y="4724400"/>
-            <a:ext cx="742950" cy="276225"/>
+            <a:ext cx="619125" cy="276225"/>
           </a:xfrm>
           <a:prstGeom prst="roundRect">
             <a:avLst>
@@ -3906,8 +3907,8 @@
         </p:nvSpPr>
         <p:spPr>
           <a:xfrm>
-            <a:off x="10731400" y="4724400"/>
-            <a:ext cx="495300" cy="276225"/>
+            <a:off x="8273950" y="5076825"/>
+            <a:ext cx="742950" cy="276225"/>
           </a:xfrm>
           <a:prstGeom prst="roundRect">
             <a:avLst>
@@ -3944,9 +3945,55 @@
           <a:p/>
         </p:txBody>
       </p:sp>
+      <p:sp>
+        <p:nvSpPr>
+          <p:cNvPr id="21" name="Rounded Rectangle 20"/>
+          <p:cNvSpPr/>
+          <p:nvPr/>
+        </p:nvSpPr>
+        <p:spPr>
+          <a:xfrm>
+            <a:off x="9093100" y="5076825"/>
+            <a:ext cx="495300" cy="276225"/>
+          </a:xfrm>
+          <a:prstGeom prst="roundRect">
+            <a:avLst>
+              <a:gd name="adj" fmla="val 50000"/>
+            </a:avLst>
+          </a:prstGeom>
+          <a:noFill/>
+          <a:ln w="9525">
+            <a:solidFill>
+              <a:srgbClr val="1F2937">
+                <a:alpha val="35000"/>
+              </a:srgbClr>
+            </a:solidFill>
+          </a:ln>
+          <a:effectLst/>
+        </p:spPr>
+        <p:style>
+          <a:lnRef idx="1">
+            <a:schemeClr val="accent1"/>
+          </a:lnRef>
+          <a:fillRef idx="3">
+            <a:schemeClr val="accent1"/>
+          </a:fillRef>
+          <a:effectRef idx="2">
+            <a:schemeClr val="accent1"/>
+          </a:effectRef>
+          <a:fontRef idx="minor">
+            <a:schemeClr val="lt1"/>
+          </a:fontRef>
+        </p:style>
+        <p:txBody>
+          <a:bodyPr rtlCol="0" anchor="ctr"/>
+          <a:lstStyle/>
+          <a:p/>
+        </p:txBody>
+      </p:sp>
       <p:pic>
         <p:nvPicPr>
-          <p:cNvPr id="21" name="Picture 20" descr="icon-target-1828e5d8c0.png"/>
+          <p:cNvPr id="22" name="Picture 21" descr="icon-target-1828e5d8c0.png"/>
           <p:cNvPicPr>
             <a:picLocks noChangeAspect="1"/>
           </p:cNvPicPr>
@@ -3970,7 +4017,7 @@
       </p:pic>
       <p:pic>
         <p:nvPicPr>
-          <p:cNvPr id="22" name="Picture 21" descr="icon-users-feee0284f2.png"/>
+          <p:cNvPr id="23" name="Picture 22" descr="icon-users-feee0284f2.png"/>
           <p:cNvPicPr>
             <a:picLocks noChangeAspect="1"/>
           </p:cNvPicPr>
@@ -3994,7 +4041,7 @@
       </p:pic>
       <p:pic>
         <p:nvPicPr>
-          <p:cNvPr id="23" name="Picture 22" descr="icon-zap-1f1bce4514.png"/>
+          <p:cNvPr id="24" name="Picture 23" descr="icon-zap-1f1bce4514.png"/>
           <p:cNvPicPr>
             <a:picLocks noChangeAspect="1"/>
           </p:cNvPicPr>
@@ -4018,7 +4065,7 @@
       </p:pic>
       <p:pic>
         <p:nvPicPr>
-          <p:cNvPr id="24" name="Picture 23" descr="icon-compass-3108a6e84c.png"/>
+          <p:cNvPr id="25" name="Picture 24" descr="icon-compass-3108a6e84c.png"/>
           <p:cNvPicPr>
             <a:picLocks noChangeAspect="1"/>
           </p:cNvPicPr>
@@ -4042,7 +4089,7 @@
       </p:pic>
       <p:sp>
         <p:nvSpPr>
-          <p:cNvPr id="25" name="TextBox 24"/>
+          <p:cNvPr id="26" name="TextBox 25"/>
           <p:cNvSpPr txBox="1"/>
           <p:nvPr/>
         </p:nvSpPr>
@@ -4082,7 +4129,7 @@
       </p:sp>
       <p:sp>
         <p:nvSpPr>
-          <p:cNvPr id="26" name="TextBox 25"/>
+          <p:cNvPr id="27" name="TextBox 26"/>
           <p:cNvSpPr txBox="1"/>
           <p:nvPr/>
         </p:nvSpPr>
@@ -4122,7 +4169,7 @@
       </p:sp>
       <p:sp>
         <p:nvSpPr>
-          <p:cNvPr id="27" name="TextBox 26"/>
+          <p:cNvPr id="28" name="TextBox 27"/>
           <p:cNvSpPr txBox="1"/>
           <p:nvPr/>
         </p:nvSpPr>
@@ -4162,7 +4209,7 @@
       </p:sp>
       <p:sp>
         <p:nvSpPr>
-          <p:cNvPr id="28" name="TextBox 27"/>
+          <p:cNvPr id="29" name="TextBox 28"/>
           <p:cNvSpPr txBox="1"/>
           <p:nvPr/>
         </p:nvSpPr>
@@ -4204,7 +4251,7 @@
       </p:sp>
       <p:sp>
         <p:nvSpPr>
-          <p:cNvPr id="29" name="TextBox 28"/>
+          <p:cNvPr id="30" name="TextBox 29"/>
           <p:cNvSpPr txBox="1"/>
           <p:nvPr/>
         </p:nvSpPr>
@@ -4246,7 +4293,7 @@
       </p:sp>
       <p:sp>
         <p:nvSpPr>
-          <p:cNvPr id="30" name="TextBox 29"/>
+          <p:cNvPr id="31" name="TextBox 30"/>
           <p:cNvSpPr txBox="1"/>
           <p:nvPr/>
         </p:nvSpPr>
@@ -4288,7 +4335,7 @@
       </p:sp>
       <p:sp>
         <p:nvSpPr>
-          <p:cNvPr id="31" name="TextBox 30"/>
+          <p:cNvPr id="32" name="TextBox 31"/>
           <p:cNvSpPr txBox="1"/>
           <p:nvPr/>
         </p:nvSpPr>
@@ -4330,7 +4377,7 @@
       </p:sp>
       <p:sp>
         <p:nvSpPr>
-          <p:cNvPr id="32" name="TextBox 31"/>
+          <p:cNvPr id="33" name="TextBox 32"/>
           <p:cNvSpPr txBox="1"/>
           <p:nvPr/>
         </p:nvSpPr>
@@ -4372,7 +4419,7 @@
       </p:sp>
       <p:sp>
         <p:nvSpPr>
-          <p:cNvPr id="33" name="TextBox 32"/>
+          <p:cNvPr id="34" name="TextBox 33"/>
           <p:cNvSpPr txBox="1"/>
           <p:nvPr/>
         </p:nvSpPr>
@@ -4412,7 +4459,7 @@
       </p:sp>
       <p:sp>
         <p:nvSpPr>
-          <p:cNvPr id="34" name="TextBox 33"/>
+          <p:cNvPr id="35" name="TextBox 34"/>
           <p:cNvSpPr txBox="1"/>
           <p:nvPr/>
         </p:nvSpPr>
@@ -4452,7 +4499,7 @@
       </p:sp>
       <p:sp>
         <p:nvSpPr>
-          <p:cNvPr id="35" name="TextBox 34"/>
+          <p:cNvPr id="36" name="TextBox 35"/>
           <p:cNvSpPr txBox="1"/>
           <p:nvPr/>
         </p:nvSpPr>
@@ -4492,7 +4539,7 @@
       </p:sp>
       <p:sp>
         <p:nvSpPr>
-          <p:cNvPr id="36" name="TextBox 35"/>
+          <p:cNvPr id="37" name="TextBox 36"/>
           <p:cNvSpPr txBox="1"/>
           <p:nvPr/>
         </p:nvSpPr>
@@ -4532,7 +4579,7 @@
       </p:sp>
       <p:sp>
         <p:nvSpPr>
-          <p:cNvPr id="37" name="TextBox 36"/>
+          <p:cNvPr id="38" name="TextBox 37"/>
           <p:cNvSpPr txBox="1"/>
           <p:nvPr/>
         </p:nvSpPr>
@@ -4572,7 +4619,7 @@
       </p:sp>
       <p:sp>
         <p:nvSpPr>
-          <p:cNvPr id="38" name="TextBox 37"/>
+          <p:cNvPr id="39" name="TextBox 38"/>
           <p:cNvSpPr txBox="1"/>
           <p:nvPr/>
         </p:nvSpPr>
@@ -4612,7 +4659,7 @@
       </p:sp>
       <p:sp>
         <p:nvSpPr>
-          <p:cNvPr id="39" name="TextBox 38"/>
+          <p:cNvPr id="40" name="TextBox 39"/>
           <p:cNvSpPr txBox="1"/>
           <p:nvPr/>
         </p:nvSpPr>
@@ -4652,7 +4699,7 @@
       </p:sp>
       <p:sp>
         <p:nvSpPr>
-          <p:cNvPr id="40" name="TextBox 39"/>
+          <p:cNvPr id="41" name="TextBox 40"/>
           <p:cNvSpPr txBox="1"/>
           <p:nvPr/>
         </p:nvSpPr>
@@ -4692,7 +4739,7 @@
       </p:sp>
       <p:sp>
         <p:nvSpPr>
-          <p:cNvPr id="41" name="TextBox 40"/>
+          <p:cNvPr id="42" name="TextBox 41"/>
           <p:cNvSpPr txBox="1"/>
           <p:nvPr/>
         </p:nvSpPr>
@@ -4732,7 +4779,7 @@
       </p:sp>
       <p:sp>
         <p:nvSpPr>
-          <p:cNvPr id="42" name="TextBox 41"/>
+          <p:cNvPr id="43" name="TextBox 42"/>
           <p:cNvSpPr txBox="1"/>
           <p:nvPr/>
         </p:nvSpPr>
@@ -4772,7 +4819,7 @@
       </p:sp>
       <p:sp>
         <p:nvSpPr>
-          <p:cNvPr id="43" name="TextBox 42"/>
+          <p:cNvPr id="44" name="TextBox 43"/>
           <p:cNvSpPr txBox="1"/>
           <p:nvPr/>
         </p:nvSpPr>
@@ -4807,14 +4854,14 @@
                 <a:latin typeface="Noto Sans TC"/>
                 <a:ea typeface="Noto Sans TC"/>
               </a:rPr>
-              <a:t>留白適中（頁邊 72px）· 每頁 ≤60 字</a:t>
-            </a:r>
-          </a:p>
-        </p:txBody>
-      </p:sp>
-      <p:sp>
-        <p:nvSpPr>
-          <p:cNvPr id="44" name="TextBox 43"/>
+              <a:t>留白適中（頁邊 72px）· 字級不縮，裝不下就拆頁</a:t>
+            </a:r>
+          </a:p>
+        </p:txBody>
+      </p:sp>
+      <p:sp>
+        <p:nvSpPr>
+          <p:cNvPr id="45" name="TextBox 44"/>
           <p:cNvSpPr txBox="1"/>
           <p:nvPr/>
         </p:nvSpPr>
@@ -4854,7 +4901,7 @@
       </p:sp>
       <p:sp>
         <p:nvSpPr>
-          <p:cNvPr id="45" name="TextBox 44"/>
+          <p:cNvPr id="46" name="TextBox 45"/>
           <p:cNvSpPr txBox="1"/>
           <p:nvPr/>
         </p:nvSpPr>
@@ -4894,7 +4941,7 @@
       </p:sp>
       <p:sp>
         <p:nvSpPr>
-          <p:cNvPr id="46" name="TextBox 45"/>
+          <p:cNvPr id="47" name="TextBox 46"/>
           <p:cNvSpPr txBox="1"/>
           <p:nvPr/>
         </p:nvSpPr>
@@ -4934,7 +4981,7 @@
       </p:sp>
       <p:sp>
         <p:nvSpPr>
-          <p:cNvPr id="47" name="TextBox 46"/>
+          <p:cNvPr id="48" name="TextBox 47"/>
           <p:cNvSpPr txBox="1"/>
           <p:nvPr/>
         </p:nvSpPr>
@@ -4974,7 +5021,7 @@
       </p:sp>
       <p:sp>
         <p:nvSpPr>
-          <p:cNvPr id="48" name="TextBox 47"/>
+          <p:cNvPr id="49" name="TextBox 48"/>
           <p:cNvSpPr txBox="1"/>
           <p:nvPr/>
         </p:nvSpPr>
@@ -5014,14 +5061,14 @@
       </p:sp>
       <p:sp>
         <p:nvSpPr>
-          <p:cNvPr id="49" name="TextBox 48"/>
+          <p:cNvPr id="50" name="TextBox 49"/>
           <p:cNvSpPr txBox="1"/>
           <p:nvPr/>
         </p:nvSpPr>
         <p:spPr>
           <a:xfrm>
             <a:off x="8273950" y="4724400"/>
-            <a:ext cx="923925" cy="314325"/>
+            <a:ext cx="676275" cy="314325"/>
           </a:xfrm>
           <a:prstGeom prst="rect">
             <a:avLst/>
@@ -5047,21 +5094,21 @@
                 <a:latin typeface="Noto Sans TC"/>
                 <a:ea typeface="Noto Sans TC"/>
               </a:rPr>
-              <a:t>一頁一數字</a:t>
-            </a:r>
-          </a:p>
-        </p:txBody>
-      </p:sp>
-      <p:sp>
-        <p:nvSpPr>
-          <p:cNvPr id="50" name="TextBox 49"/>
-          <p:cNvSpPr txBox="1"/>
-          <p:nvPr/>
-        </p:nvSpPr>
-        <p:spPr>
-          <a:xfrm>
-            <a:off x="9216925" y="4724400"/>
-            <a:ext cx="676275" cy="314325"/>
+              <a:t>長文頁</a:t>
+            </a:r>
+          </a:p>
+        </p:txBody>
+      </p:sp>
+      <p:sp>
+        <p:nvSpPr>
+          <p:cNvPr id="51" name="TextBox 50"/>
+          <p:cNvSpPr txBox="1"/>
+          <p:nvPr/>
+        </p:nvSpPr>
+        <p:spPr>
+          <a:xfrm>
+            <a:off x="8969275" y="4724400"/>
+            <a:ext cx="923925" cy="314325"/>
           </a:xfrm>
           <a:prstGeom prst="rect">
             <a:avLst/>
@@ -5087,21 +5134,21 @@
                 <a:latin typeface="Noto Sans TC"/>
                 <a:ea typeface="Noto Sans TC"/>
               </a:rPr>
-              <a:t>章節頁</a:t>
-            </a:r>
-          </a:p>
-        </p:txBody>
-      </p:sp>
-      <p:sp>
-        <p:nvSpPr>
-          <p:cNvPr id="51" name="TextBox 50"/>
+              <a:t>一頁一數字</a:t>
+            </a:r>
+          </a:p>
+        </p:txBody>
+      </p:sp>
+      <p:sp>
+        <p:nvSpPr>
+          <p:cNvPr id="52" name="TextBox 51"/>
           <p:cNvSpPr txBox="1"/>
           <p:nvPr/>
         </p:nvSpPr>
         <p:spPr>
           <a:xfrm>
             <a:off x="9912250" y="4724400"/>
-            <a:ext cx="800100" cy="314325"/>
+            <a:ext cx="676275" cy="314325"/>
           </a:xfrm>
           <a:prstGeom prst="rect">
             <a:avLst/>
@@ -5127,21 +5174,21 @@
                 <a:latin typeface="Noto Sans TC"/>
                 <a:ea typeface="Noto Sans TC"/>
               </a:rPr>
-              <a:t>步驟流程</a:t>
-            </a:r>
-          </a:p>
-        </p:txBody>
-      </p:sp>
-      <p:sp>
-        <p:nvSpPr>
-          <p:cNvPr id="52" name="TextBox 51"/>
-          <p:cNvSpPr txBox="1"/>
-          <p:nvPr/>
-        </p:nvSpPr>
-        <p:spPr>
-          <a:xfrm>
-            <a:off x="10731400" y="4724400"/>
-            <a:ext cx="552450" cy="314325"/>
+              <a:t>章節頁</a:t>
+            </a:r>
+          </a:p>
+        </p:txBody>
+      </p:sp>
+      <p:sp>
+        <p:nvSpPr>
+          <p:cNvPr id="53" name="TextBox 52"/>
+          <p:cNvSpPr txBox="1"/>
+          <p:nvPr/>
+        </p:nvSpPr>
+        <p:spPr>
+          <a:xfrm>
+            <a:off x="8273950" y="5076825"/>
+            <a:ext cx="800100" cy="314325"/>
           </a:xfrm>
           <a:prstGeom prst="rect">
             <a:avLst/>
@@ -5167,6 +5214,46 @@
                 <a:latin typeface="Noto Sans TC"/>
                 <a:ea typeface="Noto Sans TC"/>
               </a:rPr>
+              <a:t>步驟流程</a:t>
+            </a:r>
+          </a:p>
+        </p:txBody>
+      </p:sp>
+      <p:sp>
+        <p:nvSpPr>
+          <p:cNvPr id="54" name="TextBox 53"/>
+          <p:cNvSpPr txBox="1"/>
+          <p:nvPr/>
+        </p:nvSpPr>
+        <p:spPr>
+          <a:xfrm>
+            <a:off x="9093100" y="5076825"/>
+            <a:ext cx="552450" cy="314325"/>
+          </a:xfrm>
+          <a:prstGeom prst="rect">
+            <a:avLst/>
+          </a:prstGeom>
+          <a:noFill/>
+        </p:spPr>
+        <p:txBody>
+          <a:bodyPr wrap="square" lIns="0" rIns="0" tIns="0" bIns="0" anchor="t">
+            <a:spAutoFit/>
+          </a:bodyPr>
+          <a:lstStyle/>
+          <a:p>
+            <a:pPr algn="l">
+              <a:lnSpc>
+                <a:spcPts val="2175"/>
+              </a:lnSpc>
+            </a:pPr>
+            <a:r>
+              <a:rPr sz="975" b="0">
+                <a:solidFill>
+                  <a:srgbClr val="1F2937"/>
+                </a:solidFill>
+                <a:latin typeface="Noto Sans TC"/>
+                <a:ea typeface="Noto Sans TC"/>
+              </a:rPr>
               <a:t>封底</a:t>
             </a:r>
           </a:p>
@@ -5174,7 +5261,7 @@
       </p:sp>
       <p:sp>
         <p:nvSpPr>
-          <p:cNvPr id="53" name="TextBox 52"/>
+          <p:cNvPr id="55" name="TextBox 54"/>
           <p:cNvSpPr txBox="1"/>
           <p:nvPr/>
         </p:nvSpPr>
@@ -5208,6 +5295,208 @@
                 <a:ea typeface="Noto Sans TC"/>
               </a:rPr>
               <a:t>01</a:t>
+            </a:r>
+          </a:p>
+        </p:txBody>
+      </p:sp>
+    </p:spTree>
+  </p:cSld>
+  <p:clrMapOvr>
+    <a:masterClrMapping/>
+  </p:clrMapOvr>
+</p:sld>
+</file>
+
+<file path=ppt/slides/slide10.xml><?xml version="1.0" encoding="utf-8"?>
+<p:sld xmlns:a="http://schemas.openxmlformats.org/drawingml/2006/main" xmlns:p="http://schemas.openxmlformats.org/presentationml/2006/main" xmlns:r="http://schemas.openxmlformats.org/officeDocument/2006/relationships">
+  <p:cSld>
+    <p:spTree>
+      <p:nvGrpSpPr>
+        <p:cNvPr id="1" name=""/>
+        <p:cNvGrpSpPr/>
+        <p:nvPr/>
+      </p:nvGrpSpPr>
+      <p:grpSpPr/>
+      <p:pic>
+        <p:nvPicPr>
+          <p:cNvPr id="2" name="Picture 1" descr="bento-1-bake.jpg"/>
+          <p:cNvPicPr>
+            <a:picLocks noChangeAspect="1"/>
+          </p:cNvPicPr>
+          <p:nvPr/>
+        </p:nvPicPr>
+        <p:blipFill>
+          <a:blip r:embed="rId2"/>
+          <a:stretch>
+            <a:fillRect/>
+          </a:stretch>
+        </p:blipFill>
+        <p:spPr>
+          <a:xfrm>
+            <a:off x="0" y="0"/>
+            <a:ext cx="12192000" cy="6858000"/>
+          </a:xfrm>
+          <a:prstGeom prst="rect">
+            <a:avLst/>
+          </a:prstGeom>
+        </p:spPr>
+      </p:pic>
+      <p:sp>
+        <p:nvSpPr>
+          <p:cNvPr id="3" name="TextBox 2"/>
+          <p:cNvSpPr txBox="1"/>
+          <p:nvPr/>
+        </p:nvSpPr>
+        <p:spPr>
+          <a:xfrm>
+            <a:off x="10614570" y="381000"/>
+            <a:ext cx="948779" cy="285750"/>
+          </a:xfrm>
+          <a:prstGeom prst="rect">
+            <a:avLst/>
+          </a:prstGeom>
+          <a:noFill/>
+        </p:spPr>
+        <p:txBody>
+          <a:bodyPr wrap="square" lIns="0" rIns="0" tIns="0" bIns="0" anchor="t">
+            <a:spAutoFit/>
+          </a:bodyPr>
+          <a:lstStyle/>
+          <a:p>
+            <a:pPr algn="l">
+              <a:lnSpc>
+                <a:spcPts val="1950"/>
+              </a:lnSpc>
+            </a:pPr>
+            <a:r>
+              <a:rPr sz="1350" b="1" spc="405">
+                <a:solidFill>
+                  <a:srgbClr val="1F2937"/>
+                </a:solidFill>
+                <a:latin typeface="Noto Sans TC"/>
+                <a:ea typeface="Noto Sans TC"/>
+              </a:rPr>
+              <a:t>北斗電商</a:t>
+            </a:r>
+          </a:p>
+        </p:txBody>
+      </p:sp>
+      <p:sp>
+        <p:nvSpPr>
+          <p:cNvPr id="4" name="TextBox 3"/>
+          <p:cNvSpPr txBox="1"/>
+          <p:nvPr/>
+        </p:nvSpPr>
+        <p:spPr>
+          <a:xfrm>
+            <a:off x="685800" y="2861369"/>
+            <a:ext cx="10877550" cy="533400"/>
+          </a:xfrm>
+          <a:prstGeom prst="rect">
+            <a:avLst/>
+          </a:prstGeom>
+          <a:noFill/>
+        </p:spPr>
+        <p:txBody>
+          <a:bodyPr wrap="square" lIns="0" rIns="0" tIns="0" bIns="0" anchor="t">
+            <a:spAutoFit/>
+          </a:bodyPr>
+          <a:lstStyle/>
+          <a:p>
+            <a:pPr algn="l">
+              <a:lnSpc>
+                <a:spcPts val="3900"/>
+              </a:lnSpc>
+            </a:pPr>
+            <a:r>
+              <a:rPr sz="3000" b="1">
+                <a:solidFill>
+                  <a:srgbClr val="1F2937"/>
+                </a:solidFill>
+                <a:latin typeface="Noto Sans TC"/>
+                <a:ea typeface="Noto Sans TC"/>
+              </a:rPr>
+              <a:t>明年，再多一格。</a:t>
+            </a:r>
+          </a:p>
+        </p:txBody>
+      </p:sp>
+      <p:sp>
+        <p:nvSpPr>
+          <p:cNvPr id="5" name="TextBox 4"/>
+          <p:cNvSpPr txBox="1"/>
+          <p:nvPr/>
+        </p:nvSpPr>
+        <p:spPr>
+          <a:xfrm>
+            <a:off x="685800" y="3661469"/>
+            <a:ext cx="10877550" cy="373260"/>
+          </a:xfrm>
+          <a:prstGeom prst="rect">
+            <a:avLst/>
+          </a:prstGeom>
+          <a:noFill/>
+        </p:spPr>
+        <p:txBody>
+          <a:bodyPr wrap="square" lIns="0" rIns="0" tIns="0" bIns="0" anchor="t">
+            <a:spAutoFit/>
+          </a:bodyPr>
+          <a:lstStyle/>
+          <a:p>
+            <a:pPr algn="l">
+              <a:lnSpc>
+                <a:spcPts val="2640"/>
+              </a:lnSpc>
+            </a:pPr>
+            <a:r>
+              <a:rPr sz="1650" b="0">
+                <a:solidFill>
+                  <a:srgbClr val="1F2937"/>
+                </a:solidFill>
+                <a:latin typeface="Noto Sans TC"/>
+                <a:ea typeface="Noto Sans TC"/>
+              </a:rPr>
+              <a:t>ir@beidou.example（示意，換成你的）</a:t>
+            </a:r>
+          </a:p>
+        </p:txBody>
+      </p:sp>
+      <p:sp>
+        <p:nvSpPr>
+          <p:cNvPr id="6" name="TextBox 5"/>
+          <p:cNvSpPr txBox="1"/>
+          <p:nvPr/>
+        </p:nvSpPr>
+        <p:spPr>
+          <a:xfrm>
+            <a:off x="11357967" y="6362700"/>
+            <a:ext cx="205382" cy="228600"/>
+          </a:xfrm>
+          <a:prstGeom prst="rect">
+            <a:avLst/>
+          </a:prstGeom>
+          <a:noFill/>
+        </p:spPr>
+        <p:txBody>
+          <a:bodyPr wrap="square" lIns="0" rIns="0" tIns="0" bIns="0" anchor="t">
+            <a:spAutoFit/>
+          </a:bodyPr>
+          <a:lstStyle/>
+          <a:p>
+            <a:pPr algn="l">
+              <a:lnSpc>
+                <a:spcPts val="1500"/>
+              </a:lnSpc>
+            </a:pPr>
+            <a:r>
+              <a:rPr sz="1050" b="0">
+                <a:solidFill>
+                  <a:srgbClr val="1F2937"/>
+                </a:solidFill>
+                <a:latin typeface="Noto Sans TC"/>
+                <a:ea typeface="Noto Sans TC"/>
+              </a:rPr>
+              <a:t>10</a:t>
             </a:r>
           </a:p>
         </p:txBody>
@@ -7159,34 +7448,34 @@
         </p:nvSpPr>
         <p:spPr>
           <a:xfrm>
-            <a:off x="685800" y="1973609"/>
-            <a:ext cx="10877550" cy="1943100"/>
-          </a:xfrm>
-          <a:prstGeom prst="rect">
-            <a:avLst/>
-          </a:prstGeom>
-          <a:noFill/>
-        </p:spPr>
-        <p:txBody>
-          <a:bodyPr wrap="square" lIns="0" rIns="0" tIns="0" bIns="0" anchor="t">
-            <a:spAutoFit/>
-          </a:bodyPr>
-          <a:lstStyle/>
-          <a:p>
-            <a:pPr algn="l">
-              <a:lnSpc>
-                <a:spcPts val="15000"/>
-              </a:lnSpc>
-            </a:pPr>
-            <a:r>
-              <a:rPr sz="15000" b="1">
-                <a:solidFill>
-                  <a:srgbClr val="2563EB"/>
+            <a:off x="685800" y="685800"/>
+            <a:ext cx="10877550" cy="533400"/>
+          </a:xfrm>
+          <a:prstGeom prst="rect">
+            <a:avLst/>
+          </a:prstGeom>
+          <a:noFill/>
+        </p:spPr>
+        <p:txBody>
+          <a:bodyPr wrap="square" lIns="0" rIns="0" tIns="0" bIns="0" anchor="t">
+            <a:spAutoFit/>
+          </a:bodyPr>
+          <a:lstStyle/>
+          <a:p>
+            <a:pPr algn="l">
+              <a:lnSpc>
+                <a:spcPts val="3900"/>
+              </a:lnSpc>
+            </a:pPr>
+            <a:r>
+              <a:rPr sz="3000" b="1">
+                <a:solidFill>
+                  <a:srgbClr val="1F2937"/>
                 </a:solidFill>
                 <a:latin typeface="Noto Sans TC"/>
                 <a:ea typeface="Noto Sans TC"/>
               </a:rPr>
-              <a:t>34%</a:t>
+              <a:t>內文多的時候</a:t>
             </a:r>
           </a:p>
         </p:txBody>
@@ -7199,8 +7488,8 @@
         </p:nvSpPr>
         <p:spPr>
           <a:xfrm>
-            <a:off x="685800" y="4107209"/>
-            <a:ext cx="6153150" cy="373260"/>
+            <a:off x="685800" y="2193131"/>
+            <a:ext cx="9963150" cy="708421"/>
           </a:xfrm>
           <a:prstGeom prst="rect">
             <a:avLst/>
@@ -7226,7 +7515,7 @@
                 <a:latin typeface="Noto Sans TC"/>
                 <a:ea typeface="Noto Sans TC"/>
               </a:rPr>
-              <a:t>年營收成長，連續第三年雙位數。</a:t>
+              <a:t>這一頁是假字，用來示範內文很多的時候版面長什麼樣。字級還是 22，行距照大腦的設定，段落一段接一段往下排，不因為字多就把字縮小，也不把留白吃掉。</a:t>
             </a:r>
           </a:p>
         </p:txBody>
@@ -7239,36 +7528,34 @@
         </p:nvSpPr>
         <p:spPr>
           <a:xfrm>
-            <a:off x="685800" y="4670970"/>
-            <a:ext cx="6153150" cy="251370"/>
-          </a:xfrm>
-          <a:prstGeom prst="rect">
-            <a:avLst/>
-          </a:prstGeom>
-          <a:noFill/>
-        </p:spPr>
-        <p:txBody>
-          <a:bodyPr wrap="square" lIns="0" rIns="0" tIns="0" bIns="0" anchor="t">
-            <a:spAutoFit/>
-          </a:bodyPr>
-          <a:lstStyle/>
-          <a:p>
-            <a:pPr algn="l">
-              <a:lnSpc>
-                <a:spcPts val="1679"/>
-              </a:lnSpc>
-            </a:pPr>
-            <a:r>
-              <a:rPr sz="1050" b="0">
-                <a:solidFill>
-                  <a:srgbClr val="1F2937">
-                    <a:alpha val="85000"/>
-                  </a:srgbClr>
+            <a:off x="685800" y="3034903"/>
+            <a:ext cx="9963150" cy="708421"/>
+          </a:xfrm>
+          <a:prstGeom prst="rect">
+            <a:avLst/>
+          </a:prstGeom>
+          <a:noFill/>
+        </p:spPr>
+        <p:txBody>
+          <a:bodyPr wrap="square" lIns="0" rIns="0" tIns="0" bIns="0" anchor="t">
+            <a:spAutoFit/>
+          </a:bodyPr>
+          <a:lstStyle/>
+          <a:p>
+            <a:pPr algn="l">
+              <a:lnSpc>
+                <a:spcPts val="2640"/>
+              </a:lnSpc>
+            </a:pPr>
+            <a:r>
+              <a:rPr sz="1650" b="0">
+                <a:solidFill>
+                  <a:srgbClr val="1F2937"/>
                 </a:solidFill>
                 <a:latin typeface="Noto Sans TC"/>
                 <a:ea typeface="Noto Sans TC"/>
               </a:rPr>
-              <a:t>示意數字，換成你的。</a:t>
+              <a:t>假字假字，這裡通常會放一段背景說明：為什麼要做這件事、之前試過什麼、現在卡在哪裡。寫的時候一段只講一個重點，讀的人才跟得上，講的人也不會念到一半迷路。</a:t>
             </a:r>
           </a:p>
         </p:txBody>
@@ -7276,6 +7563,86 @@
       <p:sp>
         <p:nvSpPr>
           <p:cNvPr id="7" name="TextBox 6"/>
+          <p:cNvSpPr txBox="1"/>
+          <p:nvPr/>
+        </p:nvSpPr>
+        <p:spPr>
+          <a:xfrm>
+            <a:off x="685800" y="3876675"/>
+            <a:ext cx="9963150" cy="708421"/>
+          </a:xfrm>
+          <a:prstGeom prst="rect">
+            <a:avLst/>
+          </a:prstGeom>
+          <a:noFill/>
+        </p:spPr>
+        <p:txBody>
+          <a:bodyPr wrap="square" lIns="0" rIns="0" tIns="0" bIns="0" anchor="t">
+            <a:spAutoFit/>
+          </a:bodyPr>
+          <a:lstStyle/>
+          <a:p>
+            <a:pPr algn="l">
+              <a:lnSpc>
+                <a:spcPts val="2640"/>
+              </a:lnSpc>
+            </a:pPr>
+            <a:r>
+              <a:rPr sz="1650" b="0">
+                <a:solidFill>
+                  <a:srgbClr val="1F2937"/>
+                </a:solidFill>
+                <a:latin typeface="Noto Sans TC"/>
+                <a:ea typeface="Noto Sans TC"/>
+              </a:rPr>
+              <a:t>內文到這個量大概就是一頁的上限。再多就拆成兩頁，或改用三欄重點、步驟流程把重點並列；不要縮字硬塞，也不要把行距壓扁，那樣看起來就不像同一份簡報了。</a:t>
+            </a:r>
+          </a:p>
+        </p:txBody>
+      </p:sp>
+      <p:sp>
+        <p:nvSpPr>
+          <p:cNvPr id="8" name="TextBox 7"/>
+          <p:cNvSpPr txBox="1"/>
+          <p:nvPr/>
+        </p:nvSpPr>
+        <p:spPr>
+          <a:xfrm>
+            <a:off x="685800" y="4718446"/>
+            <a:ext cx="9963150" cy="708421"/>
+          </a:xfrm>
+          <a:prstGeom prst="rect">
+            <a:avLst/>
+          </a:prstGeom>
+          <a:noFill/>
+        </p:spPr>
+        <p:txBody>
+          <a:bodyPr wrap="square" lIns="0" rIns="0" tIns="0" bIns="0" anchor="t">
+            <a:spAutoFit/>
+          </a:bodyPr>
+          <a:lstStyle/>
+          <a:p>
+            <a:pPr algn="l">
+              <a:lnSpc>
+                <a:spcPts val="2640"/>
+              </a:lnSpc>
+            </a:pPr>
+            <a:r>
+              <a:rPr sz="1650" b="0">
+                <a:solidFill>
+                  <a:srgbClr val="1F2937"/>
+                </a:solidFill>
+                <a:latin typeface="Noto Sans TC"/>
+                <a:ea typeface="Noto Sans TC"/>
+              </a:rPr>
+              <a:t>最後一段留給補充：數字要有出處、名詞前後一致、日期用絕對值。這些寫在大腦的禁區裡，AI 排版時會照做，你交件前只要對一次就好。</a:t>
+            </a:r>
+          </a:p>
+        </p:txBody>
+      </p:sp>
+      <p:sp>
+        <p:nvSpPr>
+          <p:cNvPr id="9" name="TextBox 8"/>
           <p:cNvSpPr txBox="1"/>
           <p:nvPr/>
         </p:nvSpPr>
@@ -7333,7 +7700,7 @@
       <p:grpSpPr/>
       <p:pic>
         <p:nvPicPr>
-          <p:cNvPr id="2" name="Picture 1" descr="bento-3-bake.jpg"/>
+          <p:cNvPr id="2" name="Picture 1" descr="bento-1-bake.jpg"/>
           <p:cNvPicPr>
             <a:picLocks noChangeAspect="1"/>
           </p:cNvPicPr>
@@ -7385,7 +7752,7 @@
             <a:r>
               <a:rPr sz="1350" b="1" spc="405">
                 <a:solidFill>
-                  <a:srgbClr val="EEF1F5"/>
+                  <a:srgbClr val="1F2937"/>
                 </a:solidFill>
                 <a:latin typeface="Noto Sans TC"/>
                 <a:ea typeface="Noto Sans TC"/>
@@ -7403,36 +7770,34 @@
         </p:nvSpPr>
         <p:spPr>
           <a:xfrm>
-            <a:off x="685800" y="2472630"/>
-            <a:ext cx="10877550" cy="1181100"/>
-          </a:xfrm>
-          <a:prstGeom prst="rect">
-            <a:avLst/>
-          </a:prstGeom>
-          <a:noFill/>
-        </p:spPr>
-        <p:txBody>
-          <a:bodyPr wrap="square" lIns="0" rIns="0" tIns="0" bIns="0" anchor="t">
-            <a:spAutoFit/>
-          </a:bodyPr>
-          <a:lstStyle/>
-          <a:p>
-            <a:pPr algn="l">
-              <a:lnSpc>
-                <a:spcPts val="9000"/>
-              </a:lnSpc>
-            </a:pPr>
-            <a:r>
-              <a:rPr sz="9000" b="1">
-                <a:solidFill>
-                  <a:srgbClr val="EEF1F5">
-                    <a:alpha val="35000"/>
-                  </a:srgbClr>
+            <a:off x="685800" y="1973609"/>
+            <a:ext cx="10877550" cy="1943100"/>
+          </a:xfrm>
+          <a:prstGeom prst="rect">
+            <a:avLst/>
+          </a:prstGeom>
+          <a:noFill/>
+        </p:spPr>
+        <p:txBody>
+          <a:bodyPr wrap="square" lIns="0" rIns="0" tIns="0" bIns="0" anchor="t">
+            <a:spAutoFit/>
+          </a:bodyPr>
+          <a:lstStyle/>
+          <a:p>
+            <a:pPr algn="l">
+              <a:lnSpc>
+                <a:spcPts val="15000"/>
+              </a:lnSpc>
+            </a:pPr>
+            <a:r>
+              <a:rPr sz="15000" b="1">
+                <a:solidFill>
+                  <a:srgbClr val="2563EB"/>
                 </a:solidFill>
                 <a:latin typeface="Noto Sans TC"/>
                 <a:ea typeface="Noto Sans TC"/>
               </a:rPr>
-              <a:t>02</a:t>
+              <a:t>34%</a:t>
             </a:r>
           </a:p>
         </p:txBody>
@@ -7445,34 +7810,34 @@
         </p:nvSpPr>
         <p:spPr>
           <a:xfrm>
-            <a:off x="685800" y="3691830"/>
-            <a:ext cx="10877550" cy="731490"/>
-          </a:xfrm>
-          <a:prstGeom prst="rect">
-            <a:avLst/>
-          </a:prstGeom>
-          <a:noFill/>
-        </p:spPr>
-        <p:txBody>
-          <a:bodyPr wrap="square" lIns="0" rIns="0" tIns="0" bIns="0" anchor="t">
-            <a:spAutoFit/>
-          </a:bodyPr>
-          <a:lstStyle/>
-          <a:p>
-            <a:pPr algn="l">
-              <a:lnSpc>
-                <a:spcPts val="5459"/>
-              </a:lnSpc>
-            </a:pPr>
-            <a:r>
-              <a:rPr sz="4200" b="1">
-                <a:solidFill>
-                  <a:srgbClr val="EEF1F5"/>
+            <a:off x="685800" y="4107209"/>
+            <a:ext cx="6153150" cy="373260"/>
+          </a:xfrm>
+          <a:prstGeom prst="rect">
+            <a:avLst/>
+          </a:prstGeom>
+          <a:noFill/>
+        </p:spPr>
+        <p:txBody>
+          <a:bodyPr wrap="square" lIns="0" rIns="0" tIns="0" bIns="0" anchor="t">
+            <a:spAutoFit/>
+          </a:bodyPr>
+          <a:lstStyle/>
+          <a:p>
+            <a:pPr algn="l">
+              <a:lnSpc>
+                <a:spcPts val="2640"/>
+              </a:lnSpc>
+            </a:pPr>
+            <a:r>
+              <a:rPr sz="1650" b="0">
+                <a:solidFill>
+                  <a:srgbClr val="1F2937"/>
                 </a:solidFill>
                 <a:latin typeface="Noto Sans TC"/>
                 <a:ea typeface="Noto Sans TC"/>
               </a:rPr>
-              <a:t>明年</a:t>
+              <a:t>年營收成長，連續第三年雙位數。</a:t>
             </a:r>
           </a:p>
         </p:txBody>
@@ -7480,6 +7845,48 @@
       <p:sp>
         <p:nvSpPr>
           <p:cNvPr id="6" name="TextBox 5"/>
+          <p:cNvSpPr txBox="1"/>
+          <p:nvPr/>
+        </p:nvSpPr>
+        <p:spPr>
+          <a:xfrm>
+            <a:off x="685800" y="4670970"/>
+            <a:ext cx="6153150" cy="251370"/>
+          </a:xfrm>
+          <a:prstGeom prst="rect">
+            <a:avLst/>
+          </a:prstGeom>
+          <a:noFill/>
+        </p:spPr>
+        <p:txBody>
+          <a:bodyPr wrap="square" lIns="0" rIns="0" tIns="0" bIns="0" anchor="t">
+            <a:spAutoFit/>
+          </a:bodyPr>
+          <a:lstStyle/>
+          <a:p>
+            <a:pPr algn="l">
+              <a:lnSpc>
+                <a:spcPts val="1679"/>
+              </a:lnSpc>
+            </a:pPr>
+            <a:r>
+              <a:rPr sz="1050" b="0">
+                <a:solidFill>
+                  <a:srgbClr val="1F2937">
+                    <a:alpha val="85000"/>
+                  </a:srgbClr>
+                </a:solidFill>
+                <a:latin typeface="Noto Sans TC"/>
+                <a:ea typeface="Noto Sans TC"/>
+              </a:rPr>
+              <a:t>示意數字，換成你的。</a:t>
+            </a:r>
+          </a:p>
+        </p:txBody>
+      </p:sp>
+      <p:sp>
+        <p:nvSpPr>
+          <p:cNvPr id="7" name="TextBox 6"/>
           <p:cNvSpPr txBox="1"/>
           <p:nvPr/>
         </p:nvSpPr>
@@ -7507,7 +7914,7 @@
             <a:r>
               <a:rPr sz="1050" b="0">
                 <a:solidFill>
-                  <a:srgbClr val="EEF1F5"/>
+                  <a:srgbClr val="1F2937"/>
                 </a:solidFill>
                 <a:latin typeface="Noto Sans TC"/>
                 <a:ea typeface="Noto Sans TC"/>
@@ -7537,7 +7944,7 @@
       <p:grpSpPr/>
       <p:pic>
         <p:nvPicPr>
-          <p:cNvPr id="2" name="Picture 1" descr="bento-1-bake.jpg"/>
+          <p:cNvPr id="2" name="Picture 1" descr="bento-3-bake.jpg"/>
           <p:cNvPicPr>
             <a:picLocks noChangeAspect="1"/>
           </p:cNvPicPr>
@@ -7561,139 +7968,7 @@
       </p:pic>
       <p:sp>
         <p:nvSpPr>
-          <p:cNvPr id="3" name="Rounded Rectangle 2"/>
-          <p:cNvSpPr/>
-          <p:nvPr/>
-        </p:nvSpPr>
-        <p:spPr>
-          <a:xfrm>
-            <a:off x="685800" y="2918519"/>
-            <a:ext cx="3352800" cy="1744860"/>
-          </a:xfrm>
-          <a:prstGeom prst="roundRect">
-            <a:avLst>
-              <a:gd name="adj" fmla="val 13101"/>
-            </a:avLst>
-          </a:prstGeom>
-          <a:solidFill>
-            <a:srgbClr val="FFFFFF"/>
-          </a:solidFill>
-          <a:ln>
-            <a:noFill/>
-          </a:ln>
-          <a:effectLst/>
-        </p:spPr>
-        <p:style>
-          <a:lnRef idx="1">
-            <a:schemeClr val="accent1"/>
-          </a:lnRef>
-          <a:fillRef idx="3">
-            <a:schemeClr val="accent1"/>
-          </a:fillRef>
-          <a:effectRef idx="2">
-            <a:schemeClr val="accent1"/>
-          </a:effectRef>
-          <a:fontRef idx="minor">
-            <a:schemeClr val="lt1"/>
-          </a:fontRef>
-        </p:style>
-        <p:txBody>
-          <a:bodyPr rtlCol="0" anchor="ctr"/>
-          <a:lstStyle/>
-          <a:p/>
-        </p:txBody>
-      </p:sp>
-      <p:sp>
-        <p:nvSpPr>
-          <p:cNvPr id="4" name="Rounded Rectangle 3"/>
-          <p:cNvSpPr/>
-          <p:nvPr/>
-        </p:nvSpPr>
-        <p:spPr>
-          <a:xfrm>
-            <a:off x="4419600" y="2918519"/>
-            <a:ext cx="3352800" cy="1744860"/>
-          </a:xfrm>
-          <a:prstGeom prst="roundRect">
-            <a:avLst>
-              <a:gd name="adj" fmla="val 13101"/>
-            </a:avLst>
-          </a:prstGeom>
-          <a:solidFill>
-            <a:srgbClr val="FFFFFF"/>
-          </a:solidFill>
-          <a:ln>
-            <a:noFill/>
-          </a:ln>
-          <a:effectLst/>
-        </p:spPr>
-        <p:style>
-          <a:lnRef idx="1">
-            <a:schemeClr val="accent1"/>
-          </a:lnRef>
-          <a:fillRef idx="3">
-            <a:schemeClr val="accent1"/>
-          </a:fillRef>
-          <a:effectRef idx="2">
-            <a:schemeClr val="accent1"/>
-          </a:effectRef>
-          <a:fontRef idx="minor">
-            <a:schemeClr val="lt1"/>
-          </a:fontRef>
-        </p:style>
-        <p:txBody>
-          <a:bodyPr rtlCol="0" anchor="ctr"/>
-          <a:lstStyle/>
-          <a:p/>
-        </p:txBody>
-      </p:sp>
-      <p:sp>
-        <p:nvSpPr>
-          <p:cNvPr id="5" name="Rounded Rectangle 4"/>
-          <p:cNvSpPr/>
-          <p:nvPr/>
-        </p:nvSpPr>
-        <p:spPr>
-          <a:xfrm>
-            <a:off x="8153400" y="2918519"/>
-            <a:ext cx="3352800" cy="1744860"/>
-          </a:xfrm>
-          <a:prstGeom prst="roundRect">
-            <a:avLst>
-              <a:gd name="adj" fmla="val 13101"/>
-            </a:avLst>
-          </a:prstGeom>
-          <a:solidFill>
-            <a:srgbClr val="FFFFFF"/>
-          </a:solidFill>
-          <a:ln>
-            <a:noFill/>
-          </a:ln>
-          <a:effectLst/>
-        </p:spPr>
-        <p:style>
-          <a:lnRef idx="1">
-            <a:schemeClr val="accent1"/>
-          </a:lnRef>
-          <a:fillRef idx="3">
-            <a:schemeClr val="accent1"/>
-          </a:fillRef>
-          <a:effectRef idx="2">
-            <a:schemeClr val="accent1"/>
-          </a:effectRef>
-          <a:fontRef idx="minor">
-            <a:schemeClr val="lt1"/>
-          </a:fontRef>
-        </p:style>
-        <p:txBody>
-          <a:bodyPr rtlCol="0" anchor="ctr"/>
-          <a:lstStyle/>
-          <a:p/>
-        </p:txBody>
-      </p:sp>
-      <p:sp>
-        <p:nvSpPr>
-          <p:cNvPr id="6" name="TextBox 5"/>
+          <p:cNvPr id="3" name="TextBox 2"/>
           <p:cNvSpPr txBox="1"/>
           <p:nvPr/>
         </p:nvSpPr>
@@ -7721,7 +7996,7 @@
             <a:r>
               <a:rPr sz="1350" b="1" spc="405">
                 <a:solidFill>
-                  <a:srgbClr val="1F2937"/>
+                  <a:srgbClr val="EEF1F5"/>
                 </a:solidFill>
                 <a:latin typeface="Noto Sans TC"/>
                 <a:ea typeface="Noto Sans TC"/>
@@ -7733,407 +8008,89 @@
       </p:sp>
       <p:sp>
         <p:nvSpPr>
-          <p:cNvPr id="7" name="TextBox 6"/>
-          <p:cNvSpPr txBox="1"/>
-          <p:nvPr/>
-        </p:nvSpPr>
-        <p:spPr>
-          <a:xfrm>
-            <a:off x="685800" y="685800"/>
-            <a:ext cx="10877550" cy="533400"/>
-          </a:xfrm>
-          <a:prstGeom prst="rect">
-            <a:avLst/>
-          </a:prstGeom>
-          <a:noFill/>
-        </p:spPr>
-        <p:txBody>
-          <a:bodyPr wrap="square" lIns="0" rIns="0" tIns="0" bIns="0" anchor="t">
-            <a:spAutoFit/>
-          </a:bodyPr>
-          <a:lstStyle/>
-          <a:p>
-            <a:pPr algn="l">
-              <a:lnSpc>
-                <a:spcPts val="3900"/>
-              </a:lnSpc>
-            </a:pPr>
-            <a:r>
-              <a:rPr sz="3000" b="1">
-                <a:solidFill>
-                  <a:srgbClr val="1F2937"/>
+          <p:cNvPr id="4" name="TextBox 3"/>
+          <p:cNvSpPr txBox="1"/>
+          <p:nvPr/>
+        </p:nvSpPr>
+        <p:spPr>
+          <a:xfrm>
+            <a:off x="685800" y="2472630"/>
+            <a:ext cx="10877550" cy="1181100"/>
+          </a:xfrm>
+          <a:prstGeom prst="rect">
+            <a:avLst/>
+          </a:prstGeom>
+          <a:noFill/>
+        </p:spPr>
+        <p:txBody>
+          <a:bodyPr wrap="square" lIns="0" rIns="0" tIns="0" bIns="0" anchor="t">
+            <a:spAutoFit/>
+          </a:bodyPr>
+          <a:lstStyle/>
+          <a:p>
+            <a:pPr algn="l">
+              <a:lnSpc>
+                <a:spcPts val="9000"/>
+              </a:lnSpc>
+            </a:pPr>
+            <a:r>
+              <a:rPr sz="9000" b="1">
+                <a:solidFill>
+                  <a:srgbClr val="EEF1F5">
+                    <a:alpha val="35000"/>
+                  </a:srgbClr>
                 </a:solidFill>
                 <a:latin typeface="Noto Sans TC"/>
                 <a:ea typeface="Noto Sans TC"/>
               </a:rPr>
-              <a:t>三步開始</a:t>
-            </a:r>
-          </a:p>
-        </p:txBody>
-      </p:sp>
-      <p:sp>
-        <p:nvSpPr>
-          <p:cNvPr id="8" name="TextBox 7"/>
-          <p:cNvSpPr txBox="1"/>
-          <p:nvPr/>
-        </p:nvSpPr>
-        <p:spPr>
-          <a:xfrm>
-            <a:off x="990600" y="3185219"/>
-            <a:ext cx="2800350" cy="419100"/>
-          </a:xfrm>
-          <a:prstGeom prst="rect">
-            <a:avLst/>
-          </a:prstGeom>
-          <a:noFill/>
-        </p:spPr>
-        <p:txBody>
-          <a:bodyPr wrap="square" lIns="0" rIns="0" tIns="0" bIns="0" anchor="t">
-            <a:spAutoFit/>
-          </a:bodyPr>
-          <a:lstStyle/>
-          <a:p>
-            <a:pPr algn="l">
-              <a:lnSpc>
-                <a:spcPts val="3000"/>
-              </a:lnSpc>
-            </a:pPr>
-            <a:r>
-              <a:rPr sz="3000" b="1">
-                <a:solidFill>
-                  <a:srgbClr val="2563EB"/>
+              <a:t>02</a:t>
+            </a:r>
+          </a:p>
+        </p:txBody>
+      </p:sp>
+      <p:sp>
+        <p:nvSpPr>
+          <p:cNvPr id="5" name="TextBox 4"/>
+          <p:cNvSpPr txBox="1"/>
+          <p:nvPr/>
+        </p:nvSpPr>
+        <p:spPr>
+          <a:xfrm>
+            <a:off x="685800" y="3691830"/>
+            <a:ext cx="10877550" cy="731490"/>
+          </a:xfrm>
+          <a:prstGeom prst="rect">
+            <a:avLst/>
+          </a:prstGeom>
+          <a:noFill/>
+        </p:spPr>
+        <p:txBody>
+          <a:bodyPr wrap="square" lIns="0" rIns="0" tIns="0" bIns="0" anchor="t">
+            <a:spAutoFit/>
+          </a:bodyPr>
+          <a:lstStyle/>
+          <a:p>
+            <a:pPr algn="l">
+              <a:lnSpc>
+                <a:spcPts val="5459"/>
+              </a:lnSpc>
+            </a:pPr>
+            <a:r>
+              <a:rPr sz="4200" b="1">
+                <a:solidFill>
+                  <a:srgbClr val="EEF1F5"/>
                 </a:solidFill>
                 <a:latin typeface="Noto Sans TC"/>
                 <a:ea typeface="Noto Sans TC"/>
               </a:rPr>
-              <a:t>01</a:t>
-            </a:r>
-          </a:p>
-        </p:txBody>
-      </p:sp>
-      <p:sp>
-        <p:nvSpPr>
-          <p:cNvPr id="9" name="TextBox 8"/>
-          <p:cNvSpPr txBox="1"/>
-          <p:nvPr/>
-        </p:nvSpPr>
-        <p:spPr>
-          <a:xfrm>
-            <a:off x="990600" y="3699569"/>
-            <a:ext cx="2800350" cy="342900"/>
-          </a:xfrm>
-          <a:prstGeom prst="rect">
-            <a:avLst/>
-          </a:prstGeom>
-          <a:noFill/>
-        </p:spPr>
-        <p:txBody>
-          <a:bodyPr wrap="square" lIns="0" rIns="0" tIns="0" bIns="0" anchor="t">
-            <a:spAutoFit/>
-          </a:bodyPr>
-          <a:lstStyle/>
-          <a:p>
-            <a:pPr algn="l">
-              <a:lnSpc>
-                <a:spcPts val="2400"/>
-              </a:lnSpc>
-            </a:pPr>
-            <a:r>
-              <a:rPr sz="1650" b="0">
-                <a:solidFill>
-                  <a:srgbClr val="1F2937"/>
-                </a:solidFill>
-                <a:latin typeface="Noto Sans TC"/>
-                <a:ea typeface="Noto Sans TC"/>
-              </a:rPr>
-              <a:t>會員分級</a:t>
-            </a:r>
-          </a:p>
-        </p:txBody>
-      </p:sp>
-      <p:sp>
-        <p:nvSpPr>
-          <p:cNvPr id="10" name="TextBox 9"/>
-          <p:cNvSpPr txBox="1"/>
-          <p:nvPr/>
-        </p:nvSpPr>
-        <p:spPr>
-          <a:xfrm>
-            <a:off x="990600" y="4061519"/>
-            <a:ext cx="2800350" cy="373260"/>
-          </a:xfrm>
-          <a:prstGeom prst="rect">
-            <a:avLst/>
-          </a:prstGeom>
-          <a:noFill/>
-        </p:spPr>
-        <p:txBody>
-          <a:bodyPr wrap="square" lIns="0" rIns="0" tIns="0" bIns="0" anchor="t">
-            <a:spAutoFit/>
-          </a:bodyPr>
-          <a:lstStyle/>
-          <a:p>
-            <a:pPr algn="l">
-              <a:lnSpc>
-                <a:spcPts val="2640"/>
-              </a:lnSpc>
-            </a:pPr>
-            <a:r>
-              <a:rPr sz="1650" b="0">
-                <a:solidFill>
-                  <a:srgbClr val="1F2937"/>
-                </a:solidFill>
-                <a:latin typeface="Noto Sans TC"/>
-                <a:ea typeface="Noto Sans TC"/>
-              </a:rPr>
-              <a:t>Q1 上線，分三級。</a:t>
-            </a:r>
-          </a:p>
-        </p:txBody>
-      </p:sp>
-      <p:sp>
-        <p:nvSpPr>
-          <p:cNvPr id="11" name="TextBox 10"/>
-          <p:cNvSpPr txBox="1"/>
-          <p:nvPr/>
-        </p:nvSpPr>
-        <p:spPr>
-          <a:xfrm>
-            <a:off x="4724400" y="3185219"/>
-            <a:ext cx="2800350" cy="419100"/>
-          </a:xfrm>
-          <a:prstGeom prst="rect">
-            <a:avLst/>
-          </a:prstGeom>
-          <a:noFill/>
-        </p:spPr>
-        <p:txBody>
-          <a:bodyPr wrap="square" lIns="0" rIns="0" tIns="0" bIns="0" anchor="t">
-            <a:spAutoFit/>
-          </a:bodyPr>
-          <a:lstStyle/>
-          <a:p>
-            <a:pPr algn="l">
-              <a:lnSpc>
-                <a:spcPts val="3000"/>
-              </a:lnSpc>
-            </a:pPr>
-            <a:r>
-              <a:rPr sz="3000" b="1">
-                <a:solidFill>
-                  <a:srgbClr val="2563EB"/>
-                </a:solidFill>
-                <a:latin typeface="Noto Sans TC"/>
-                <a:ea typeface="Noto Sans TC"/>
-              </a:rPr>
-              <a:t>02</a:t>
-            </a:r>
-          </a:p>
-        </p:txBody>
-      </p:sp>
-      <p:sp>
-        <p:nvSpPr>
-          <p:cNvPr id="12" name="TextBox 11"/>
-          <p:cNvSpPr txBox="1"/>
-          <p:nvPr/>
-        </p:nvSpPr>
-        <p:spPr>
-          <a:xfrm>
-            <a:off x="4724400" y="3699569"/>
-            <a:ext cx="2800350" cy="342900"/>
-          </a:xfrm>
-          <a:prstGeom prst="rect">
-            <a:avLst/>
-          </a:prstGeom>
-          <a:noFill/>
-        </p:spPr>
-        <p:txBody>
-          <a:bodyPr wrap="square" lIns="0" rIns="0" tIns="0" bIns="0" anchor="t">
-            <a:spAutoFit/>
-          </a:bodyPr>
-          <a:lstStyle/>
-          <a:p>
-            <a:pPr algn="l">
-              <a:lnSpc>
-                <a:spcPts val="2400"/>
-              </a:lnSpc>
-            </a:pPr>
-            <a:r>
-              <a:rPr sz="1650" b="0">
-                <a:solidFill>
-                  <a:srgbClr val="1F2937"/>
-                </a:solidFill>
-                <a:latin typeface="Noto Sans TC"/>
-                <a:ea typeface="Noto Sans TC"/>
-              </a:rPr>
-              <a:t>自有物流</a:t>
-            </a:r>
-          </a:p>
-        </p:txBody>
-      </p:sp>
-      <p:sp>
-        <p:nvSpPr>
-          <p:cNvPr id="13" name="TextBox 12"/>
-          <p:cNvSpPr txBox="1"/>
-          <p:nvPr/>
-        </p:nvSpPr>
-        <p:spPr>
-          <a:xfrm>
-            <a:off x="4724400" y="4061519"/>
-            <a:ext cx="2800350" cy="373260"/>
-          </a:xfrm>
-          <a:prstGeom prst="rect">
-            <a:avLst/>
-          </a:prstGeom>
-          <a:noFill/>
-        </p:spPr>
-        <p:txBody>
-          <a:bodyPr wrap="square" lIns="0" rIns="0" tIns="0" bIns="0" anchor="t">
-            <a:spAutoFit/>
-          </a:bodyPr>
-          <a:lstStyle/>
-          <a:p>
-            <a:pPr algn="l">
-              <a:lnSpc>
-                <a:spcPts val="2640"/>
-              </a:lnSpc>
-            </a:pPr>
-            <a:r>
-              <a:rPr sz="1650" b="0">
-                <a:solidFill>
-                  <a:srgbClr val="1F2937"/>
-                </a:solidFill>
-                <a:latin typeface="Noto Sans TC"/>
-                <a:ea typeface="Noto Sans TC"/>
-              </a:rPr>
-              <a:t>Q2 覆蓋北北基。</a:t>
-            </a:r>
-          </a:p>
-        </p:txBody>
-      </p:sp>
-      <p:sp>
-        <p:nvSpPr>
-          <p:cNvPr id="14" name="TextBox 13"/>
-          <p:cNvSpPr txBox="1"/>
-          <p:nvPr/>
-        </p:nvSpPr>
-        <p:spPr>
-          <a:xfrm>
-            <a:off x="8458200" y="3185219"/>
-            <a:ext cx="2800350" cy="419100"/>
-          </a:xfrm>
-          <a:prstGeom prst="rect">
-            <a:avLst/>
-          </a:prstGeom>
-          <a:noFill/>
-        </p:spPr>
-        <p:txBody>
-          <a:bodyPr wrap="square" lIns="0" rIns="0" tIns="0" bIns="0" anchor="t">
-            <a:spAutoFit/>
-          </a:bodyPr>
-          <a:lstStyle/>
-          <a:p>
-            <a:pPr algn="l">
-              <a:lnSpc>
-                <a:spcPts val="3000"/>
-              </a:lnSpc>
-            </a:pPr>
-            <a:r>
-              <a:rPr sz="3000" b="1">
-                <a:solidFill>
-                  <a:srgbClr val="2563EB"/>
-                </a:solidFill>
-                <a:latin typeface="Noto Sans TC"/>
-                <a:ea typeface="Noto Sans TC"/>
-              </a:rPr>
-              <a:t>03</a:t>
-            </a:r>
-          </a:p>
-        </p:txBody>
-      </p:sp>
-      <p:sp>
-        <p:nvSpPr>
-          <p:cNvPr id="15" name="TextBox 14"/>
-          <p:cNvSpPr txBox="1"/>
-          <p:nvPr/>
-        </p:nvSpPr>
-        <p:spPr>
-          <a:xfrm>
-            <a:off x="8458200" y="3699569"/>
-            <a:ext cx="2800350" cy="342900"/>
-          </a:xfrm>
-          <a:prstGeom prst="rect">
-            <a:avLst/>
-          </a:prstGeom>
-          <a:noFill/>
-        </p:spPr>
-        <p:txBody>
-          <a:bodyPr wrap="square" lIns="0" rIns="0" tIns="0" bIns="0" anchor="t">
-            <a:spAutoFit/>
-          </a:bodyPr>
-          <a:lstStyle/>
-          <a:p>
-            <a:pPr algn="l">
-              <a:lnSpc>
-                <a:spcPts val="2400"/>
-              </a:lnSpc>
-            </a:pPr>
-            <a:r>
-              <a:rPr sz="1650" b="0">
-                <a:solidFill>
-                  <a:srgbClr val="1F2937"/>
-                </a:solidFill>
-                <a:latin typeface="Noto Sans TC"/>
-                <a:ea typeface="Noto Sans TC"/>
-              </a:rPr>
-              <a:t>第二品類</a:t>
-            </a:r>
-          </a:p>
-        </p:txBody>
-      </p:sp>
-      <p:sp>
-        <p:nvSpPr>
-          <p:cNvPr id="16" name="TextBox 15"/>
-          <p:cNvSpPr txBox="1"/>
-          <p:nvPr/>
-        </p:nvSpPr>
-        <p:spPr>
-          <a:xfrm>
-            <a:off x="8458200" y="4061519"/>
-            <a:ext cx="2800350" cy="373260"/>
-          </a:xfrm>
-          <a:prstGeom prst="rect">
-            <a:avLst/>
-          </a:prstGeom>
-          <a:noFill/>
-        </p:spPr>
-        <p:txBody>
-          <a:bodyPr wrap="square" lIns="0" rIns="0" tIns="0" bIns="0" anchor="t">
-            <a:spAutoFit/>
-          </a:bodyPr>
-          <a:lstStyle/>
-          <a:p>
-            <a:pPr algn="l">
-              <a:lnSpc>
-                <a:spcPts val="2640"/>
-              </a:lnSpc>
-            </a:pPr>
-            <a:r>
-              <a:rPr sz="1650" b="0">
-                <a:solidFill>
-                  <a:srgbClr val="1F2937"/>
-                </a:solidFill>
-                <a:latin typeface="Noto Sans TC"/>
-                <a:ea typeface="Noto Sans TC"/>
-              </a:rPr>
-              <a:t>Q3 開賣。</a:t>
-            </a:r>
-          </a:p>
-        </p:txBody>
-      </p:sp>
-      <p:sp>
-        <p:nvSpPr>
-          <p:cNvPr id="17" name="TextBox 16"/>
+              <a:t>明年</a:t>
+            </a:r>
+          </a:p>
+        </p:txBody>
+      </p:sp>
+      <p:sp>
+        <p:nvSpPr>
+          <p:cNvPr id="6" name="TextBox 5"/>
           <p:cNvSpPr txBox="1"/>
           <p:nvPr/>
         </p:nvSpPr>
@@ -8161,7 +8118,7 @@
             <a:r>
               <a:rPr sz="1050" b="0">
                 <a:solidFill>
-                  <a:srgbClr val="1F2937"/>
+                  <a:srgbClr val="EEF1F5"/>
                 </a:solidFill>
                 <a:latin typeface="Noto Sans TC"/>
                 <a:ea typeface="Noto Sans TC"/>
@@ -8215,7 +8172,139 @@
       </p:pic>
       <p:sp>
         <p:nvSpPr>
-          <p:cNvPr id="3" name="TextBox 2"/>
+          <p:cNvPr id="3" name="Rounded Rectangle 2"/>
+          <p:cNvSpPr/>
+          <p:nvPr/>
+        </p:nvSpPr>
+        <p:spPr>
+          <a:xfrm>
+            <a:off x="685800" y="2918519"/>
+            <a:ext cx="3352800" cy="1744860"/>
+          </a:xfrm>
+          <a:prstGeom prst="roundRect">
+            <a:avLst>
+              <a:gd name="adj" fmla="val 13101"/>
+            </a:avLst>
+          </a:prstGeom>
+          <a:solidFill>
+            <a:srgbClr val="FFFFFF"/>
+          </a:solidFill>
+          <a:ln>
+            <a:noFill/>
+          </a:ln>
+          <a:effectLst/>
+        </p:spPr>
+        <p:style>
+          <a:lnRef idx="1">
+            <a:schemeClr val="accent1"/>
+          </a:lnRef>
+          <a:fillRef idx="3">
+            <a:schemeClr val="accent1"/>
+          </a:fillRef>
+          <a:effectRef idx="2">
+            <a:schemeClr val="accent1"/>
+          </a:effectRef>
+          <a:fontRef idx="minor">
+            <a:schemeClr val="lt1"/>
+          </a:fontRef>
+        </p:style>
+        <p:txBody>
+          <a:bodyPr rtlCol="0" anchor="ctr"/>
+          <a:lstStyle/>
+          <a:p/>
+        </p:txBody>
+      </p:sp>
+      <p:sp>
+        <p:nvSpPr>
+          <p:cNvPr id="4" name="Rounded Rectangle 3"/>
+          <p:cNvSpPr/>
+          <p:nvPr/>
+        </p:nvSpPr>
+        <p:spPr>
+          <a:xfrm>
+            <a:off x="4419600" y="2918519"/>
+            <a:ext cx="3352800" cy="1744860"/>
+          </a:xfrm>
+          <a:prstGeom prst="roundRect">
+            <a:avLst>
+              <a:gd name="adj" fmla="val 13101"/>
+            </a:avLst>
+          </a:prstGeom>
+          <a:solidFill>
+            <a:srgbClr val="FFFFFF"/>
+          </a:solidFill>
+          <a:ln>
+            <a:noFill/>
+          </a:ln>
+          <a:effectLst/>
+        </p:spPr>
+        <p:style>
+          <a:lnRef idx="1">
+            <a:schemeClr val="accent1"/>
+          </a:lnRef>
+          <a:fillRef idx="3">
+            <a:schemeClr val="accent1"/>
+          </a:fillRef>
+          <a:effectRef idx="2">
+            <a:schemeClr val="accent1"/>
+          </a:effectRef>
+          <a:fontRef idx="minor">
+            <a:schemeClr val="lt1"/>
+          </a:fontRef>
+        </p:style>
+        <p:txBody>
+          <a:bodyPr rtlCol="0" anchor="ctr"/>
+          <a:lstStyle/>
+          <a:p/>
+        </p:txBody>
+      </p:sp>
+      <p:sp>
+        <p:nvSpPr>
+          <p:cNvPr id="5" name="Rounded Rectangle 4"/>
+          <p:cNvSpPr/>
+          <p:nvPr/>
+        </p:nvSpPr>
+        <p:spPr>
+          <a:xfrm>
+            <a:off x="8153400" y="2918519"/>
+            <a:ext cx="3352800" cy="1744860"/>
+          </a:xfrm>
+          <a:prstGeom prst="roundRect">
+            <a:avLst>
+              <a:gd name="adj" fmla="val 13101"/>
+            </a:avLst>
+          </a:prstGeom>
+          <a:solidFill>
+            <a:srgbClr val="FFFFFF"/>
+          </a:solidFill>
+          <a:ln>
+            <a:noFill/>
+          </a:ln>
+          <a:effectLst/>
+        </p:spPr>
+        <p:style>
+          <a:lnRef idx="1">
+            <a:schemeClr val="accent1"/>
+          </a:lnRef>
+          <a:fillRef idx="3">
+            <a:schemeClr val="accent1"/>
+          </a:fillRef>
+          <a:effectRef idx="2">
+            <a:schemeClr val="accent1"/>
+          </a:effectRef>
+          <a:fontRef idx="minor">
+            <a:schemeClr val="lt1"/>
+          </a:fontRef>
+        </p:style>
+        <p:txBody>
+          <a:bodyPr rtlCol="0" anchor="ctr"/>
+          <a:lstStyle/>
+          <a:p/>
+        </p:txBody>
+      </p:sp>
+      <p:sp>
+        <p:nvSpPr>
+          <p:cNvPr id="6" name="TextBox 5"/>
           <p:cNvSpPr txBox="1"/>
           <p:nvPr/>
         </p:nvSpPr>
@@ -8255,13 +8344,13 @@
       </p:sp>
       <p:sp>
         <p:nvSpPr>
-          <p:cNvPr id="4" name="TextBox 3"/>
-          <p:cNvSpPr txBox="1"/>
-          <p:nvPr/>
-        </p:nvSpPr>
-        <p:spPr>
-          <a:xfrm>
-            <a:off x="685800" y="2861369"/>
+          <p:cNvPr id="7" name="TextBox 6"/>
+          <p:cNvSpPr txBox="1"/>
+          <p:nvPr/>
+        </p:nvSpPr>
+        <p:spPr>
+          <a:xfrm>
+            <a:off x="685800" y="685800"/>
             <a:ext cx="10877550" cy="533400"/>
           </a:xfrm>
           <a:prstGeom prst="rect">
@@ -8288,54 +8377,374 @@
                 <a:latin typeface="Noto Sans TC"/>
                 <a:ea typeface="Noto Sans TC"/>
               </a:rPr>
-              <a:t>明年，再多一格。</a:t>
-            </a:r>
-          </a:p>
-        </p:txBody>
-      </p:sp>
-      <p:sp>
-        <p:nvSpPr>
-          <p:cNvPr id="5" name="TextBox 4"/>
-          <p:cNvSpPr txBox="1"/>
-          <p:nvPr/>
-        </p:nvSpPr>
-        <p:spPr>
-          <a:xfrm>
-            <a:off x="685800" y="3661469"/>
-            <a:ext cx="10877550" cy="373260"/>
-          </a:xfrm>
-          <a:prstGeom prst="rect">
-            <a:avLst/>
-          </a:prstGeom>
-          <a:noFill/>
-        </p:spPr>
-        <p:txBody>
-          <a:bodyPr wrap="square" lIns="0" rIns="0" tIns="0" bIns="0" anchor="t">
-            <a:spAutoFit/>
-          </a:bodyPr>
-          <a:lstStyle/>
-          <a:p>
-            <a:pPr algn="l">
-              <a:lnSpc>
-                <a:spcPts val="2640"/>
-              </a:lnSpc>
-            </a:pPr>
-            <a:r>
-              <a:rPr sz="1650" b="0">
-                <a:solidFill>
-                  <a:srgbClr val="1F2937"/>
+              <a:t>三步開始</a:t>
+            </a:r>
+          </a:p>
+        </p:txBody>
+      </p:sp>
+      <p:sp>
+        <p:nvSpPr>
+          <p:cNvPr id="8" name="TextBox 7"/>
+          <p:cNvSpPr txBox="1"/>
+          <p:nvPr/>
+        </p:nvSpPr>
+        <p:spPr>
+          <a:xfrm>
+            <a:off x="990600" y="3185219"/>
+            <a:ext cx="2800350" cy="419100"/>
+          </a:xfrm>
+          <a:prstGeom prst="rect">
+            <a:avLst/>
+          </a:prstGeom>
+          <a:noFill/>
+        </p:spPr>
+        <p:txBody>
+          <a:bodyPr wrap="square" lIns="0" rIns="0" tIns="0" bIns="0" anchor="t">
+            <a:spAutoFit/>
+          </a:bodyPr>
+          <a:lstStyle/>
+          <a:p>
+            <a:pPr algn="l">
+              <a:lnSpc>
+                <a:spcPts val="3000"/>
+              </a:lnSpc>
+            </a:pPr>
+            <a:r>
+              <a:rPr sz="3000" b="1">
+                <a:solidFill>
+                  <a:srgbClr val="2563EB"/>
                 </a:solidFill>
                 <a:latin typeface="Noto Sans TC"/>
                 <a:ea typeface="Noto Sans TC"/>
               </a:rPr>
-              <a:t>ir@beidou.example（示意，換成你的）</a:t>
-            </a:r>
-          </a:p>
-        </p:txBody>
-      </p:sp>
-      <p:sp>
-        <p:nvSpPr>
-          <p:cNvPr id="6" name="TextBox 5"/>
+              <a:t>01</a:t>
+            </a:r>
+          </a:p>
+        </p:txBody>
+      </p:sp>
+      <p:sp>
+        <p:nvSpPr>
+          <p:cNvPr id="9" name="TextBox 8"/>
+          <p:cNvSpPr txBox="1"/>
+          <p:nvPr/>
+        </p:nvSpPr>
+        <p:spPr>
+          <a:xfrm>
+            <a:off x="990600" y="3699569"/>
+            <a:ext cx="2800350" cy="342900"/>
+          </a:xfrm>
+          <a:prstGeom prst="rect">
+            <a:avLst/>
+          </a:prstGeom>
+          <a:noFill/>
+        </p:spPr>
+        <p:txBody>
+          <a:bodyPr wrap="square" lIns="0" rIns="0" tIns="0" bIns="0" anchor="t">
+            <a:spAutoFit/>
+          </a:bodyPr>
+          <a:lstStyle/>
+          <a:p>
+            <a:pPr algn="l">
+              <a:lnSpc>
+                <a:spcPts val="2400"/>
+              </a:lnSpc>
+            </a:pPr>
+            <a:r>
+              <a:rPr sz="1650" b="0">
+                <a:solidFill>
+                  <a:srgbClr val="1F2937"/>
+                </a:solidFill>
+                <a:latin typeface="Noto Sans TC"/>
+                <a:ea typeface="Noto Sans TC"/>
+              </a:rPr>
+              <a:t>會員分級</a:t>
+            </a:r>
+          </a:p>
+        </p:txBody>
+      </p:sp>
+      <p:sp>
+        <p:nvSpPr>
+          <p:cNvPr id="10" name="TextBox 9"/>
+          <p:cNvSpPr txBox="1"/>
+          <p:nvPr/>
+        </p:nvSpPr>
+        <p:spPr>
+          <a:xfrm>
+            <a:off x="990600" y="4061519"/>
+            <a:ext cx="2800350" cy="373260"/>
+          </a:xfrm>
+          <a:prstGeom prst="rect">
+            <a:avLst/>
+          </a:prstGeom>
+          <a:noFill/>
+        </p:spPr>
+        <p:txBody>
+          <a:bodyPr wrap="square" lIns="0" rIns="0" tIns="0" bIns="0" anchor="t">
+            <a:spAutoFit/>
+          </a:bodyPr>
+          <a:lstStyle/>
+          <a:p>
+            <a:pPr algn="l">
+              <a:lnSpc>
+                <a:spcPts val="2640"/>
+              </a:lnSpc>
+            </a:pPr>
+            <a:r>
+              <a:rPr sz="1650" b="0">
+                <a:solidFill>
+                  <a:srgbClr val="1F2937"/>
+                </a:solidFill>
+                <a:latin typeface="Noto Sans TC"/>
+                <a:ea typeface="Noto Sans TC"/>
+              </a:rPr>
+              <a:t>Q1 上線，分三級。</a:t>
+            </a:r>
+          </a:p>
+        </p:txBody>
+      </p:sp>
+      <p:sp>
+        <p:nvSpPr>
+          <p:cNvPr id="11" name="TextBox 10"/>
+          <p:cNvSpPr txBox="1"/>
+          <p:nvPr/>
+        </p:nvSpPr>
+        <p:spPr>
+          <a:xfrm>
+            <a:off x="4724400" y="3185219"/>
+            <a:ext cx="2800350" cy="419100"/>
+          </a:xfrm>
+          <a:prstGeom prst="rect">
+            <a:avLst/>
+          </a:prstGeom>
+          <a:noFill/>
+        </p:spPr>
+        <p:txBody>
+          <a:bodyPr wrap="square" lIns="0" rIns="0" tIns="0" bIns="0" anchor="t">
+            <a:spAutoFit/>
+          </a:bodyPr>
+          <a:lstStyle/>
+          <a:p>
+            <a:pPr algn="l">
+              <a:lnSpc>
+                <a:spcPts val="3000"/>
+              </a:lnSpc>
+            </a:pPr>
+            <a:r>
+              <a:rPr sz="3000" b="1">
+                <a:solidFill>
+                  <a:srgbClr val="2563EB"/>
+                </a:solidFill>
+                <a:latin typeface="Noto Sans TC"/>
+                <a:ea typeface="Noto Sans TC"/>
+              </a:rPr>
+              <a:t>02</a:t>
+            </a:r>
+          </a:p>
+        </p:txBody>
+      </p:sp>
+      <p:sp>
+        <p:nvSpPr>
+          <p:cNvPr id="12" name="TextBox 11"/>
+          <p:cNvSpPr txBox="1"/>
+          <p:nvPr/>
+        </p:nvSpPr>
+        <p:spPr>
+          <a:xfrm>
+            <a:off x="4724400" y="3699569"/>
+            <a:ext cx="2800350" cy="342900"/>
+          </a:xfrm>
+          <a:prstGeom prst="rect">
+            <a:avLst/>
+          </a:prstGeom>
+          <a:noFill/>
+        </p:spPr>
+        <p:txBody>
+          <a:bodyPr wrap="square" lIns="0" rIns="0" tIns="0" bIns="0" anchor="t">
+            <a:spAutoFit/>
+          </a:bodyPr>
+          <a:lstStyle/>
+          <a:p>
+            <a:pPr algn="l">
+              <a:lnSpc>
+                <a:spcPts val="2400"/>
+              </a:lnSpc>
+            </a:pPr>
+            <a:r>
+              <a:rPr sz="1650" b="0">
+                <a:solidFill>
+                  <a:srgbClr val="1F2937"/>
+                </a:solidFill>
+                <a:latin typeface="Noto Sans TC"/>
+                <a:ea typeface="Noto Sans TC"/>
+              </a:rPr>
+              <a:t>自有物流</a:t>
+            </a:r>
+          </a:p>
+        </p:txBody>
+      </p:sp>
+      <p:sp>
+        <p:nvSpPr>
+          <p:cNvPr id="13" name="TextBox 12"/>
+          <p:cNvSpPr txBox="1"/>
+          <p:nvPr/>
+        </p:nvSpPr>
+        <p:spPr>
+          <a:xfrm>
+            <a:off x="4724400" y="4061519"/>
+            <a:ext cx="2800350" cy="373260"/>
+          </a:xfrm>
+          <a:prstGeom prst="rect">
+            <a:avLst/>
+          </a:prstGeom>
+          <a:noFill/>
+        </p:spPr>
+        <p:txBody>
+          <a:bodyPr wrap="square" lIns="0" rIns="0" tIns="0" bIns="0" anchor="t">
+            <a:spAutoFit/>
+          </a:bodyPr>
+          <a:lstStyle/>
+          <a:p>
+            <a:pPr algn="l">
+              <a:lnSpc>
+                <a:spcPts val="2640"/>
+              </a:lnSpc>
+            </a:pPr>
+            <a:r>
+              <a:rPr sz="1650" b="0">
+                <a:solidFill>
+                  <a:srgbClr val="1F2937"/>
+                </a:solidFill>
+                <a:latin typeface="Noto Sans TC"/>
+                <a:ea typeface="Noto Sans TC"/>
+              </a:rPr>
+              <a:t>Q2 覆蓋北北基。</a:t>
+            </a:r>
+          </a:p>
+        </p:txBody>
+      </p:sp>
+      <p:sp>
+        <p:nvSpPr>
+          <p:cNvPr id="14" name="TextBox 13"/>
+          <p:cNvSpPr txBox="1"/>
+          <p:nvPr/>
+        </p:nvSpPr>
+        <p:spPr>
+          <a:xfrm>
+            <a:off x="8458200" y="3185219"/>
+            <a:ext cx="2800350" cy="419100"/>
+          </a:xfrm>
+          <a:prstGeom prst="rect">
+            <a:avLst/>
+          </a:prstGeom>
+          <a:noFill/>
+        </p:spPr>
+        <p:txBody>
+          <a:bodyPr wrap="square" lIns="0" rIns="0" tIns="0" bIns="0" anchor="t">
+            <a:spAutoFit/>
+          </a:bodyPr>
+          <a:lstStyle/>
+          <a:p>
+            <a:pPr algn="l">
+              <a:lnSpc>
+                <a:spcPts val="3000"/>
+              </a:lnSpc>
+            </a:pPr>
+            <a:r>
+              <a:rPr sz="3000" b="1">
+                <a:solidFill>
+                  <a:srgbClr val="2563EB"/>
+                </a:solidFill>
+                <a:latin typeface="Noto Sans TC"/>
+                <a:ea typeface="Noto Sans TC"/>
+              </a:rPr>
+              <a:t>03</a:t>
+            </a:r>
+          </a:p>
+        </p:txBody>
+      </p:sp>
+      <p:sp>
+        <p:nvSpPr>
+          <p:cNvPr id="15" name="TextBox 14"/>
+          <p:cNvSpPr txBox="1"/>
+          <p:nvPr/>
+        </p:nvSpPr>
+        <p:spPr>
+          <a:xfrm>
+            <a:off x="8458200" y="3699569"/>
+            <a:ext cx="2800350" cy="342900"/>
+          </a:xfrm>
+          <a:prstGeom prst="rect">
+            <a:avLst/>
+          </a:prstGeom>
+          <a:noFill/>
+        </p:spPr>
+        <p:txBody>
+          <a:bodyPr wrap="square" lIns="0" rIns="0" tIns="0" bIns="0" anchor="t">
+            <a:spAutoFit/>
+          </a:bodyPr>
+          <a:lstStyle/>
+          <a:p>
+            <a:pPr algn="l">
+              <a:lnSpc>
+                <a:spcPts val="2400"/>
+              </a:lnSpc>
+            </a:pPr>
+            <a:r>
+              <a:rPr sz="1650" b="0">
+                <a:solidFill>
+                  <a:srgbClr val="1F2937"/>
+                </a:solidFill>
+                <a:latin typeface="Noto Sans TC"/>
+                <a:ea typeface="Noto Sans TC"/>
+              </a:rPr>
+              <a:t>第二品類</a:t>
+            </a:r>
+          </a:p>
+        </p:txBody>
+      </p:sp>
+      <p:sp>
+        <p:nvSpPr>
+          <p:cNvPr id="16" name="TextBox 15"/>
+          <p:cNvSpPr txBox="1"/>
+          <p:nvPr/>
+        </p:nvSpPr>
+        <p:spPr>
+          <a:xfrm>
+            <a:off x="8458200" y="4061519"/>
+            <a:ext cx="2800350" cy="373260"/>
+          </a:xfrm>
+          <a:prstGeom prst="rect">
+            <a:avLst/>
+          </a:prstGeom>
+          <a:noFill/>
+        </p:spPr>
+        <p:txBody>
+          <a:bodyPr wrap="square" lIns="0" rIns="0" tIns="0" bIns="0" anchor="t">
+            <a:spAutoFit/>
+          </a:bodyPr>
+          <a:lstStyle/>
+          <a:p>
+            <a:pPr algn="l">
+              <a:lnSpc>
+                <a:spcPts val="2640"/>
+              </a:lnSpc>
+            </a:pPr>
+            <a:r>
+              <a:rPr sz="1650" b="0">
+                <a:solidFill>
+                  <a:srgbClr val="1F2937"/>
+                </a:solidFill>
+                <a:latin typeface="Noto Sans TC"/>
+                <a:ea typeface="Noto Sans TC"/>
+              </a:rPr>
+              <a:t>Q3 開賣。</a:t>
+            </a:r>
+          </a:p>
+        </p:txBody>
+      </p:sp>
+      <p:sp>
+        <p:nvSpPr>
+          <p:cNvPr id="17" name="TextBox 16"/>
           <p:cNvSpPr txBox="1"/>
           <p:nvPr/>
         </p:nvSpPr>
